--- a/sekisan/docs/KCM積算ツール_操作マニュアル.pptx
+++ b/sekisan/docs/KCM積算ツール_操作マニュアル.pptx
@@ -1569,7 +1569,7 @@
     <p:bg>
       <p:bgPr>
         <a:solidFill>
-          <a:srgbClr val="1E2761"/>
+          <a:srgbClr val="FFFFFF"/>
         </a:solidFill>
       </p:bgPr>
     </p:bg>
@@ -1587,15 +1587,124 @@
           <a:chExt cx="0" cy="0"/>
         </a:xfrm>
       </p:grpSpPr>
-      <p:sp>
-        <p:nvSpPr>
-          <p:cNvPr id="2" name="Text 0"/>
+      <p:pic>
+        <p:nvPicPr>
+          <p:cNvPr id="2" name="Image 0" descr="/tmp/claude-0/-home-user-takashima-yuto-site/d68be841-4a50-5410-afb9-fdf52bb655ee/scratchpad/sekisan/kcm_stripe.png">    </p:cNvPr>
+          <p:cNvPicPr>
+            <a:picLocks noChangeAspect="1"/>
+          </p:cNvPicPr>
+          <p:nvPr/>
+        </p:nvPicPr>
+        <p:blipFill>
+          <a:blip r:embed="rId1"/>
+          <a:stretch>
+            <a:fillRect/>
+          </a:stretch>
+        </p:blipFill>
+        <p:spPr>
+          <a:xfrm>
+            <a:off x="0" y="6656832"/>
+            <a:ext cx="12188952" cy="201168"/>
+          </a:xfrm>
+          <a:prstGeom prst="rect">
+            <a:avLst/>
+          </a:prstGeom>
+        </p:spPr>
+      </p:pic>
+      <p:pic>
+        <p:nvPicPr>
+          <p:cNvPr id="3" name="Image 1" descr="/tmp/claude-0/-home-user-takashima-yuto-site/d68be841-4a50-5410-afb9-fdf52bb655ee/scratchpad/sekisan/kcm_logo_placeholder.png">    </p:cNvPr>
+          <p:cNvPicPr>
+            <a:picLocks noChangeAspect="1"/>
+          </p:cNvPicPr>
+          <p:nvPr/>
+        </p:nvPicPr>
+        <p:blipFill>
+          <a:blip r:embed="rId2"/>
+          <a:stretch>
+            <a:fillRect/>
+          </a:stretch>
+        </p:blipFill>
+        <p:spPr>
+          <a:xfrm>
+            <a:off x="502920" y="411480"/>
+            <a:ext cx="960120" cy="403250"/>
+          </a:xfrm>
+          <a:prstGeom prst="rect">
+            <a:avLst/>
+          </a:prstGeom>
+        </p:spPr>
+      </p:pic>
+      <p:sp>
+        <p:nvSpPr>
+          <p:cNvPr id="4" name="Text 0"/>
           <p:cNvSpPr txBox="1"/>
           <p:nvPr/>
         </p:nvSpPr>
         <p:spPr>
           <a:xfrm>
-            <a:off x="822960" y="2240280"/>
+            <a:off x="548640" y="2148840"/>
+            <a:ext cx="10972800" cy="320040"/>
+          </a:xfrm>
+          <a:prstGeom prst="rect">
+            <a:avLst/>
+          </a:prstGeom>
+          <a:noFill/>
+          <a:ln/>
+        </p:spPr>
+        <p:txBody>
+          <a:bodyPr wrap="square" lIns="0" tIns="0" rIns="0" bIns="0" rtlCol="0" anchor="ctr"/>
+          <a:lstStyle/>
+          <a:p>
+            <a:pPr indent="0" marL="0">
+              <a:buNone/>
+            </a:pPr>
+            <a:r>
+              <a:rPr lang="en-US" sz="1300" b="1" spc="300" kern="0" dirty="0">
+                <a:solidFill>
+                  <a:srgbClr val="045292"/>
+                </a:solidFill>
+                <a:latin typeface="Arial" pitchFamily="34" charset="0"/>
+                <a:ea typeface="Arial" pitchFamily="34" charset="-122"/>
+                <a:cs typeface="Arial" pitchFamily="34" charset="-120"/>
+              </a:rPr>
+              <a:t>OPERATION MANUAL</a:t>
+            </a:r>
+            <a:endParaRPr lang="en-US" sz="1300" dirty="0"/>
+          </a:p>
+        </p:txBody>
+      </p:sp>
+      <p:sp>
+        <p:nvSpPr>
+          <p:cNvPr id="5" name="Shape 1"/>
+          <p:cNvSpPr/>
+          <p:nvPr/>
+        </p:nvSpPr>
+        <p:spPr>
+          <a:xfrm>
+            <a:off x="475488" y="3154680"/>
+            <a:ext cx="5669280" cy="402336"/>
+          </a:xfrm>
+          <a:prstGeom prst="rect">
+            <a:avLst/>
+          </a:prstGeom>
+          <a:solidFill>
+            <a:srgbClr val="E3EA61">
+              <a:alpha val="75000"/>
+            </a:srgbClr>
+          </a:solidFill>
+          <a:ln/>
+        </p:spPr>
+      </p:sp>
+      <p:sp>
+        <p:nvSpPr>
+          <p:cNvPr id="6" name="Text 2"/>
+          <p:cNvSpPr txBox="1"/>
+          <p:nvPr/>
+        </p:nvSpPr>
+        <p:spPr>
+          <a:xfrm>
+            <a:off x="548640" y="2514600"/>
             <a:ext cx="10515600" cy="914400"/>
           </a:xfrm>
           <a:prstGeom prst="rect">
@@ -1614,7 +1723,7 @@
             <a:r>
               <a:rPr lang="en-US" sz="5000" b="1" dirty="0">
                 <a:solidFill>
-                  <a:srgbClr val="FFFFFF"/>
+                  <a:srgbClr val="1C2430"/>
                 </a:solidFill>
                 <a:latin typeface="Meiryo UI" pitchFamily="34" charset="0"/>
                 <a:ea typeface="Meiryo UI" pitchFamily="34" charset="-122"/>
@@ -1628,14 +1737,14 @@
       </p:sp>
       <p:sp>
         <p:nvSpPr>
-          <p:cNvPr id="3" name="Text 1"/>
+          <p:cNvPr id="7" name="Text 3"/>
           <p:cNvSpPr txBox="1"/>
           <p:nvPr/>
         </p:nvSpPr>
         <p:spPr>
           <a:xfrm>
-            <a:off x="841248" y="3291840"/>
-            <a:ext cx="10515600" cy="640080"/>
+            <a:off x="566928" y="3611880"/>
+            <a:ext cx="10515600" cy="594360"/>
           </a:xfrm>
           <a:prstGeom prst="rect">
             <a:avLst/>
@@ -1651,9 +1760,9 @@
               <a:buNone/>
             </a:pPr>
             <a:r>
-              <a:rPr lang="en-US" sz="3000" dirty="0">
+              <a:rPr lang="en-US" sz="2800" b="1" dirty="0">
                 <a:solidFill>
-                  <a:srgbClr val="CADCFC"/>
+                  <a:srgbClr val="045292"/>
                 </a:solidFill>
                 <a:latin typeface="Meiryo UI" pitchFamily="34" charset="0"/>
                 <a:ea typeface="Meiryo UI" pitchFamily="34" charset="-122"/>
@@ -1661,19 +1770,19 @@
               </a:rPr>
               <a:t>操作マニュアル</a:t>
             </a:r>
-            <a:endParaRPr lang="en-US" sz="3000" dirty="0"/>
+            <a:endParaRPr lang="en-US" sz="2800" dirty="0"/>
           </a:p>
         </p:txBody>
       </p:sp>
       <p:sp>
         <p:nvSpPr>
-          <p:cNvPr id="4" name="Text 2"/>
+          <p:cNvPr id="8" name="Text 4"/>
           <p:cNvSpPr txBox="1"/>
           <p:nvPr/>
         </p:nvSpPr>
         <p:spPr>
           <a:xfrm>
-            <a:off x="841248" y="4069080"/>
+            <a:off x="566928" y="4343400"/>
             <a:ext cx="9601200" cy="457200"/>
           </a:xfrm>
           <a:prstGeom prst="rect">
@@ -1692,7 +1801,7 @@
             <a:r>
               <a:rPr lang="en-US" sz="1400" dirty="0">
                 <a:solidFill>
-                  <a:srgbClr val="CADCFC"/>
+                  <a:srgbClr val="5A6472"/>
                 </a:solidFill>
                 <a:latin typeface="Meiryo UI" pitchFamily="34" charset="0"/>
                 <a:ea typeface="Meiryo UI" pitchFamily="34" charset="-122"/>
@@ -1706,13 +1815,13 @@
       </p:sp>
       <p:sp>
         <p:nvSpPr>
-          <p:cNvPr id="5" name="Text 3"/>
+          <p:cNvPr id="9" name="Text 5"/>
           <p:cNvSpPr txBox="1"/>
           <p:nvPr/>
         </p:nvSpPr>
         <p:spPr>
           <a:xfrm>
-            <a:off x="841248" y="5806440"/>
+            <a:off x="566928" y="5760720"/>
             <a:ext cx="7315200" cy="411480"/>
           </a:xfrm>
           <a:prstGeom prst="rect">
@@ -1731,13 +1840,13 @@
             <a:r>
               <a:rPr lang="en-US" sz="1400" dirty="0">
                 <a:solidFill>
-                  <a:srgbClr val="CADCFC"/>
+                  <a:srgbClr val="5A6472"/>
                 </a:solidFill>
                 <a:latin typeface="Meiryo UI" pitchFamily="34" charset="0"/>
                 <a:ea typeface="Meiryo UI" pitchFamily="34" charset="-122"/>
                 <a:cs typeface="Meiryo UI" pitchFamily="34" charset="-120"/>
               </a:rPr>
-              <a:t>第1.0版　2026年9月　　株式会社カイカ</a:t>
+              <a:t>第1.1版　2026年9月　　株式会社カイカ</a:t>
             </a:r>
             <a:endParaRPr lang="en-US" sz="1400" dirty="0"/>
           </a:p>
@@ -1775,9 +1884,55 @@
           <a:chExt cx="0" cy="0"/>
         </a:xfrm>
       </p:grpSpPr>
-      <p:sp>
-        <p:nvSpPr>
-          <p:cNvPr id="2" name="Text 0"/>
+      <p:pic>
+        <p:nvPicPr>
+          <p:cNvPr id="2" name="Image 0" descr="/tmp/claude-0/-home-user-takashima-yuto-site/d68be841-4a50-5410-afb9-fdf52bb655ee/scratchpad/sekisan/kcm_stripe.png">    </p:cNvPr>
+          <p:cNvPicPr>
+            <a:picLocks noChangeAspect="1"/>
+          </p:cNvPicPr>
+          <p:nvPr/>
+        </p:nvPicPr>
+        <p:blipFill>
+          <a:blip r:embed="rId1"/>
+          <a:stretch>
+            <a:fillRect/>
+          </a:stretch>
+        </p:blipFill>
+        <p:spPr>
+          <a:xfrm>
+            <a:off x="0" y="6656832"/>
+            <a:ext cx="12188952" cy="201168"/>
+          </a:xfrm>
+          <a:prstGeom prst="rect">
+            <a:avLst/>
+          </a:prstGeom>
+        </p:spPr>
+      </p:pic>
+      <p:sp>
+        <p:nvSpPr>
+          <p:cNvPr id="3" name="Shape 0"/>
+          <p:cNvSpPr/>
+          <p:nvPr/>
+        </p:nvSpPr>
+        <p:spPr>
+          <a:xfrm>
+            <a:off x="457200" y="658368"/>
+            <a:ext cx="6199632" cy="292608"/>
+          </a:xfrm>
+          <a:prstGeom prst="rect">
+            <a:avLst/>
+          </a:prstGeom>
+          <a:solidFill>
+            <a:srgbClr val="E3EA61">
+              <a:alpha val="75000"/>
+            </a:srgbClr>
+          </a:solidFill>
+          <a:ln/>
+        </p:spPr>
+      </p:sp>
+      <p:sp>
+        <p:nvSpPr>
+          <p:cNvPr id="4" name="Text 1"/>
           <p:cNvSpPr txBox="1"/>
           <p:nvPr/>
         </p:nvSpPr>
@@ -1802,7 +1957,7 @@
             <a:r>
               <a:rPr lang="en-US" sz="2500" b="1" dirty="0">
                 <a:solidFill>
-                  <a:srgbClr val="1E2761"/>
+                  <a:srgbClr val="1C2430"/>
                 </a:solidFill>
                 <a:latin typeface="Meiryo UI" pitchFamily="34" charset="0"/>
                 <a:ea typeface="Meiryo UI" pitchFamily="34" charset="-122"/>
@@ -1816,7 +1971,7 @@
       </p:sp>
       <p:sp>
         <p:nvSpPr>
-          <p:cNvPr id="3" name="Text 1"/>
+          <p:cNvPr id="5" name="Text 2"/>
           <p:cNvSpPr txBox="1"/>
           <p:nvPr/>
         </p:nvSpPr>
@@ -1855,7 +2010,7 @@
       </p:sp>
       <p:sp>
         <p:nvSpPr>
-          <p:cNvPr id="4" name="Text 2"/>
+          <p:cNvPr id="6" name="Text 3"/>
           <p:cNvSpPr txBox="1"/>
           <p:nvPr/>
         </p:nvSpPr>
@@ -1897,7 +2052,7 @@
       </p:sp>
       <p:sp>
         <p:nvSpPr>
-          <p:cNvPr id="5" name="Shape 3"/>
+          <p:cNvPr id="7" name="Shape 4"/>
           <p:cNvSpPr/>
           <p:nvPr/>
         </p:nvSpPr>
@@ -1912,14 +2067,14 @@
             </a:avLst>
           </a:prstGeom>
           <a:solidFill>
-            <a:srgbClr val="F4F6F8"/>
+            <a:srgbClr val="F5F8FA"/>
           </a:solidFill>
           <a:ln/>
         </p:spPr>
       </p:sp>
       <p:sp>
         <p:nvSpPr>
-          <p:cNvPr id="6" name="Text 4"/>
+          <p:cNvPr id="8" name="Text 5"/>
           <p:cNvSpPr txBox="1"/>
           <p:nvPr/>
         </p:nvSpPr>
@@ -1944,7 +2099,7 @@
             <a:r>
               <a:rPr lang="en-US" sz="1500" b="1" dirty="0">
                 <a:solidFill>
-                  <a:srgbClr val="1E2761"/>
+                  <a:srgbClr val="045292"/>
                 </a:solidFill>
                 <a:latin typeface="Meiryo UI" pitchFamily="34" charset="0"/>
                 <a:ea typeface="Meiryo UI" pitchFamily="34" charset="-122"/>
@@ -1958,7 +2113,7 @@
       </p:sp>
       <p:sp>
         <p:nvSpPr>
-          <p:cNvPr id="7" name="Text 5"/>
+          <p:cNvPr id="9" name="Text 6"/>
           <p:cNvSpPr txBox="1"/>
           <p:nvPr/>
         </p:nvSpPr>
@@ -2000,7 +2155,7 @@
       </p:sp>
       <p:sp>
         <p:nvSpPr>
-          <p:cNvPr id="8" name="Text 6"/>
+          <p:cNvPr id="10" name="Text 7"/>
           <p:cNvSpPr txBox="1"/>
           <p:nvPr/>
         </p:nvSpPr>
@@ -2025,7 +2180,7 @@
             <a:r>
               <a:rPr lang="en-US" sz="1300" dirty="0">
                 <a:solidFill>
-                  <a:srgbClr val="0F6AB4"/>
+                  <a:srgbClr val="045292"/>
                 </a:solidFill>
                 <a:latin typeface="Meiryo UI" pitchFamily="34" charset="0"/>
                 <a:ea typeface="Meiryo UI" pitchFamily="34" charset="-122"/>
@@ -2039,7 +2194,7 @@
       </p:sp>
       <p:sp>
         <p:nvSpPr>
-          <p:cNvPr id="9" name="Shape 7"/>
+          <p:cNvPr id="11" name="Shape 8"/>
           <p:cNvSpPr/>
           <p:nvPr/>
         </p:nvSpPr>
@@ -2054,14 +2209,14 @@
             </a:avLst>
           </a:prstGeom>
           <a:solidFill>
-            <a:srgbClr val="1E2761"/>
+            <a:srgbClr val="045292"/>
           </a:solidFill>
           <a:ln/>
         </p:spPr>
       </p:sp>
       <p:sp>
         <p:nvSpPr>
-          <p:cNvPr id="10" name="Text 8"/>
+          <p:cNvPr id="12" name="Text 9"/>
           <p:cNvSpPr txBox="1"/>
           <p:nvPr/>
         </p:nvSpPr>
@@ -2100,7 +2255,7 @@
       </p:sp>
       <p:sp>
         <p:nvSpPr>
-          <p:cNvPr id="11" name="Text 9"/>
+          <p:cNvPr id="13" name="Text 10"/>
           <p:cNvSpPr txBox="1"/>
           <p:nvPr/>
         </p:nvSpPr>
@@ -2128,7 +2283,7 @@
             <a:r>
               <a:rPr lang="en-US" sz="1150" dirty="0">
                 <a:solidFill>
-                  <a:srgbClr val="CADCFC"/>
+                  <a:srgbClr val="D9E9F8"/>
                 </a:solidFill>
                 <a:latin typeface="Meiryo UI" pitchFamily="34" charset="0"/>
                 <a:ea typeface="Meiryo UI" pitchFamily="34" charset="-122"/>
@@ -2142,7 +2297,7 @@
       </p:sp>
       <p:sp>
         <p:nvSpPr>
-          <p:cNvPr id="12" name="Text 10"/>
+          <p:cNvPr id="14" name="Text 11"/>
           <p:cNvSpPr txBox="1"/>
           <p:nvPr/>
         </p:nvSpPr>
@@ -2167,7 +2322,7 @@
             <a:r>
               <a:rPr lang="en-US" sz="1300" dirty="0">
                 <a:solidFill>
-                  <a:srgbClr val="0F6AB4"/>
+                  <a:srgbClr val="045292"/>
                 </a:solidFill>
                 <a:latin typeface="Meiryo UI" pitchFamily="34" charset="0"/>
                 <a:ea typeface="Meiryo UI" pitchFamily="34" charset="-122"/>
@@ -2181,7 +2336,7 @@
       </p:sp>
       <p:sp>
         <p:nvSpPr>
-          <p:cNvPr id="13" name="Shape 11"/>
+          <p:cNvPr id="15" name="Shape 12"/>
           <p:cNvSpPr/>
           <p:nvPr/>
         </p:nvSpPr>
@@ -2196,14 +2351,14 @@
             </a:avLst>
           </a:prstGeom>
           <a:solidFill>
-            <a:srgbClr val="F4F6F8"/>
+            <a:srgbClr val="F5F8FA"/>
           </a:solidFill>
           <a:ln/>
         </p:spPr>
       </p:sp>
       <p:sp>
         <p:nvSpPr>
-          <p:cNvPr id="14" name="Text 12"/>
+          <p:cNvPr id="16" name="Text 13"/>
           <p:cNvSpPr txBox="1"/>
           <p:nvPr/>
         </p:nvSpPr>
@@ -2228,7 +2383,7 @@
             <a:r>
               <a:rPr lang="en-US" sz="1500" b="1" dirty="0">
                 <a:solidFill>
-                  <a:srgbClr val="1E2761"/>
+                  <a:srgbClr val="045292"/>
                 </a:solidFill>
                 <a:latin typeface="Meiryo UI" pitchFamily="34" charset="0"/>
                 <a:ea typeface="Meiryo UI" pitchFamily="34" charset="-122"/>
@@ -2242,7 +2397,7 @@
       </p:sp>
       <p:sp>
         <p:nvSpPr>
-          <p:cNvPr id="15" name="Text 13"/>
+          <p:cNvPr id="17" name="Text 14"/>
           <p:cNvSpPr txBox="1"/>
           <p:nvPr/>
         </p:nvSpPr>
@@ -2284,7 +2439,7 @@
       </p:sp>
       <p:sp>
         <p:nvSpPr>
-          <p:cNvPr id="16" name="Text 14"/>
+          <p:cNvPr id="18" name="Text 15"/>
           <p:cNvSpPr txBox="1"/>
           <p:nvPr/>
         </p:nvSpPr>
@@ -2309,7 +2464,7 @@
             <a:r>
               <a:rPr lang="en-US" sz="1600" b="1" dirty="0">
                 <a:solidFill>
-                  <a:srgbClr val="0F6AB4"/>
+                  <a:srgbClr val="045292"/>
                 </a:solidFill>
                 <a:latin typeface="Meiryo UI" pitchFamily="34" charset="0"/>
                 <a:ea typeface="Meiryo UI" pitchFamily="34" charset="-122"/>
@@ -2323,7 +2478,7 @@
       </p:sp>
       <p:sp>
         <p:nvSpPr>
-          <p:cNvPr id="17" name="Text 15"/>
+          <p:cNvPr id="19" name="Text 16"/>
           <p:cNvSpPr txBox="1"/>
           <p:nvPr/>
         </p:nvSpPr>
@@ -2459,9 +2614,55 @@
           <a:chExt cx="0" cy="0"/>
         </a:xfrm>
       </p:grpSpPr>
-      <p:sp>
-        <p:nvSpPr>
-          <p:cNvPr id="2" name="Text 0"/>
+      <p:pic>
+        <p:nvPicPr>
+          <p:cNvPr id="2" name="Image 0" descr="/tmp/claude-0/-home-user-takashima-yuto-site/d68be841-4a50-5410-afb9-fdf52bb655ee/scratchpad/sekisan/kcm_stripe.png">    </p:cNvPr>
+          <p:cNvPicPr>
+            <a:picLocks noChangeAspect="1"/>
+          </p:cNvPicPr>
+          <p:nvPr/>
+        </p:nvPicPr>
+        <p:blipFill>
+          <a:blip r:embed="rId1"/>
+          <a:stretch>
+            <a:fillRect/>
+          </a:stretch>
+        </p:blipFill>
+        <p:spPr>
+          <a:xfrm>
+            <a:off x="0" y="6656832"/>
+            <a:ext cx="12188952" cy="201168"/>
+          </a:xfrm>
+          <a:prstGeom prst="rect">
+            <a:avLst/>
+          </a:prstGeom>
+        </p:spPr>
+      </p:pic>
+      <p:sp>
+        <p:nvSpPr>
+          <p:cNvPr id="3" name="Shape 0"/>
+          <p:cNvSpPr/>
+          <p:nvPr/>
+        </p:nvSpPr>
+        <p:spPr>
+          <a:xfrm>
+            <a:off x="457200" y="658368"/>
+            <a:ext cx="5541264" cy="292608"/>
+          </a:xfrm>
+          <a:prstGeom prst="rect">
+            <a:avLst/>
+          </a:prstGeom>
+          <a:solidFill>
+            <a:srgbClr val="E3EA61">
+              <a:alpha val="75000"/>
+            </a:srgbClr>
+          </a:solidFill>
+          <a:ln/>
+        </p:spPr>
+      </p:sp>
+      <p:sp>
+        <p:nvSpPr>
+          <p:cNvPr id="4" name="Text 1"/>
           <p:cNvSpPr txBox="1"/>
           <p:nvPr/>
         </p:nvSpPr>
@@ -2486,7 +2687,7 @@
             <a:r>
               <a:rPr lang="en-US" sz="2500" b="1" dirty="0">
                 <a:solidFill>
-                  <a:srgbClr val="1E2761"/>
+                  <a:srgbClr val="1C2430"/>
                 </a:solidFill>
                 <a:latin typeface="Meiryo UI" pitchFamily="34" charset="0"/>
                 <a:ea typeface="Meiryo UI" pitchFamily="34" charset="-122"/>
@@ -2500,7 +2701,7 @@
       </p:sp>
       <p:sp>
         <p:nvSpPr>
-          <p:cNvPr id="3" name="Text 1"/>
+          <p:cNvPr id="5" name="Text 2"/>
           <p:cNvSpPr txBox="1"/>
           <p:nvPr/>
         </p:nvSpPr>
@@ -2539,14 +2740,14 @@
       </p:sp>
       <p:pic>
         <p:nvPicPr>
-          <p:cNvPr id="4" name="Image 0" descr="shots/01_top.png">    </p:cNvPr>
+          <p:cNvPr id="6" name="Image 1" descr="shots/01_top.png">    </p:cNvPr>
           <p:cNvPicPr>
             <a:picLocks noChangeAspect="1"/>
           </p:cNvPicPr>
           <p:nvPr/>
         </p:nvPicPr>
         <p:blipFill>
-          <a:blip r:embed="rId1"/>
+          <a:blip r:embed="rId2"/>
           <a:stretch>
             <a:fillRect/>
           </a:stretch>
@@ -2570,7 +2771,7 @@
       </p:pic>
       <p:sp>
         <p:nvSpPr>
-          <p:cNvPr id="5" name="Text 2"/>
+          <p:cNvPr id="7" name="Text 3"/>
           <p:cNvSpPr txBox="1"/>
           <p:nvPr/>
         </p:nvSpPr>
@@ -2595,7 +2796,7 @@
             <a:r>
               <a:rPr lang="en-US" sz="1600" b="1" dirty="0">
                 <a:solidFill>
-                  <a:srgbClr val="0F6AB4"/>
+                  <a:srgbClr val="045292"/>
                 </a:solidFill>
                 <a:latin typeface="Meiryo UI" pitchFamily="34" charset="0"/>
                 <a:ea typeface="Meiryo UI" pitchFamily="34" charset="-122"/>
@@ -2609,7 +2810,7 @@
       </p:sp>
       <p:sp>
         <p:nvSpPr>
-          <p:cNvPr id="6" name="Shape 3"/>
+          <p:cNvPr id="8" name="Shape 4"/>
           <p:cNvSpPr/>
           <p:nvPr/>
         </p:nvSpPr>
@@ -2622,14 +2823,14 @@
             <a:avLst/>
           </a:prstGeom>
           <a:solidFill>
-            <a:srgbClr val="0F6AB4"/>
+            <a:srgbClr val="045292"/>
           </a:solidFill>
           <a:ln/>
         </p:spPr>
       </p:sp>
       <p:sp>
         <p:nvSpPr>
-          <p:cNvPr id="7" name="Text 4"/>
+          <p:cNvPr id="9" name="Text 5"/>
           <p:cNvSpPr txBox="1"/>
           <p:nvPr/>
         </p:nvSpPr>
@@ -2668,7 +2869,7 @@
       </p:sp>
       <p:sp>
         <p:nvSpPr>
-          <p:cNvPr id="8" name="Text 5"/>
+          <p:cNvPr id="10" name="Text 6"/>
           <p:cNvSpPr txBox="1"/>
           <p:nvPr/>
         </p:nvSpPr>
@@ -2710,7 +2911,7 @@
       </p:sp>
       <p:sp>
         <p:nvSpPr>
-          <p:cNvPr id="9" name="Shape 6"/>
+          <p:cNvPr id="11" name="Shape 7"/>
           <p:cNvSpPr/>
           <p:nvPr/>
         </p:nvSpPr>
@@ -2723,14 +2924,14 @@
             <a:avLst/>
           </a:prstGeom>
           <a:solidFill>
-            <a:srgbClr val="0F6AB4"/>
+            <a:srgbClr val="045292"/>
           </a:solidFill>
           <a:ln/>
         </p:spPr>
       </p:sp>
       <p:sp>
         <p:nvSpPr>
-          <p:cNvPr id="10" name="Text 7"/>
+          <p:cNvPr id="12" name="Text 8"/>
           <p:cNvSpPr txBox="1"/>
           <p:nvPr/>
         </p:nvSpPr>
@@ -2769,7 +2970,7 @@
       </p:sp>
       <p:sp>
         <p:nvSpPr>
-          <p:cNvPr id="11" name="Text 8"/>
+          <p:cNvPr id="13" name="Text 9"/>
           <p:cNvSpPr txBox="1"/>
           <p:nvPr/>
         </p:nvSpPr>
@@ -2811,7 +3012,7 @@
       </p:sp>
       <p:sp>
         <p:nvSpPr>
-          <p:cNvPr id="12" name="Shape 9"/>
+          <p:cNvPr id="14" name="Shape 10"/>
           <p:cNvSpPr/>
           <p:nvPr/>
         </p:nvSpPr>
@@ -2824,14 +3025,14 @@
             <a:avLst/>
           </a:prstGeom>
           <a:solidFill>
-            <a:srgbClr val="0F6AB4"/>
+            <a:srgbClr val="045292"/>
           </a:solidFill>
           <a:ln/>
         </p:spPr>
       </p:sp>
       <p:sp>
         <p:nvSpPr>
-          <p:cNvPr id="13" name="Text 10"/>
+          <p:cNvPr id="15" name="Text 11"/>
           <p:cNvSpPr txBox="1"/>
           <p:nvPr/>
         </p:nvSpPr>
@@ -2870,7 +3071,7 @@
       </p:sp>
       <p:sp>
         <p:nvSpPr>
-          <p:cNvPr id="14" name="Text 11"/>
+          <p:cNvPr id="16" name="Text 12"/>
           <p:cNvSpPr txBox="1"/>
           <p:nvPr/>
         </p:nvSpPr>
@@ -2912,7 +3113,7 @@
       </p:sp>
       <p:sp>
         <p:nvSpPr>
-          <p:cNvPr id="15" name="Shape 12"/>
+          <p:cNvPr id="17" name="Shape 13"/>
           <p:cNvSpPr/>
           <p:nvPr/>
         </p:nvSpPr>
@@ -2934,7 +3135,7 @@
       </p:sp>
       <p:sp>
         <p:nvSpPr>
-          <p:cNvPr id="16" name="Text 13"/>
+          <p:cNvPr id="18" name="Text 14"/>
           <p:cNvSpPr txBox="1"/>
           <p:nvPr/>
         </p:nvSpPr>
@@ -2962,7 +3163,7 @@
             <a:r>
               <a:rPr lang="en-US" sz="1150" b="1" dirty="0">
                 <a:solidFill>
-                  <a:srgbClr val="0F6AB4"/>
+                  <a:srgbClr val="045292"/>
                 </a:solidFill>
                 <a:latin typeface="Meiryo UI" pitchFamily="34" charset="0"/>
                 <a:ea typeface="Meiryo UI" pitchFamily="34" charset="-122"/>
@@ -3029,7 +3230,7 @@
                       <a:r>
                         <a:rPr lang="en-US" sz="1150" b="1" dirty="0">
                           <a:solidFill>
-                            <a:srgbClr val="1E2761"/>
+                            <a:srgbClr val="045292"/>
                           </a:solidFill>
                           <a:latin typeface="Meiryo UI" pitchFamily="34" charset="0"/>
                           <a:ea typeface="Meiryo UI" pitchFamily="34" charset="-122"/>
@@ -3097,7 +3298,7 @@
                       <a:r>
                         <a:rPr lang="en-US" sz="1150" b="1" dirty="0">
                           <a:solidFill>
-                            <a:srgbClr val="1E2761"/>
+                            <a:srgbClr val="045292"/>
                           </a:solidFill>
                           <a:latin typeface="Meiryo UI" pitchFamily="34" charset="0"/>
                           <a:ea typeface="Meiryo UI" pitchFamily="34" charset="-122"/>
@@ -3587,9 +3788,55 @@
           <a:chExt cx="0" cy="0"/>
         </a:xfrm>
       </p:grpSpPr>
-      <p:sp>
-        <p:nvSpPr>
-          <p:cNvPr id="2" name="Text 0"/>
+      <p:pic>
+        <p:nvPicPr>
+          <p:cNvPr id="2" name="Image 0" descr="/tmp/claude-0/-home-user-takashima-yuto-site/d68be841-4a50-5410-afb9-fdf52bb655ee/scratchpad/sekisan/kcm_stripe.png">    </p:cNvPr>
+          <p:cNvPicPr>
+            <a:picLocks noChangeAspect="1"/>
+          </p:cNvPicPr>
+          <p:nvPr/>
+        </p:nvPicPr>
+        <p:blipFill>
+          <a:blip r:embed="rId1"/>
+          <a:stretch>
+            <a:fillRect/>
+          </a:stretch>
+        </p:blipFill>
+        <p:spPr>
+          <a:xfrm>
+            <a:off x="0" y="6656832"/>
+            <a:ext cx="12188952" cy="201168"/>
+          </a:xfrm>
+          <a:prstGeom prst="rect">
+            <a:avLst/>
+          </a:prstGeom>
+        </p:spPr>
+      </p:pic>
+      <p:sp>
+        <p:nvSpPr>
+          <p:cNvPr id="3" name="Shape 0"/>
+          <p:cNvSpPr/>
+          <p:nvPr/>
+        </p:nvSpPr>
+        <p:spPr>
+          <a:xfrm>
+            <a:off x="457200" y="658368"/>
+            <a:ext cx="4224528" cy="292608"/>
+          </a:xfrm>
+          <a:prstGeom prst="rect">
+            <a:avLst/>
+          </a:prstGeom>
+          <a:solidFill>
+            <a:srgbClr val="E3EA61">
+              <a:alpha val="75000"/>
+            </a:srgbClr>
+          </a:solidFill>
+          <a:ln/>
+        </p:spPr>
+      </p:sp>
+      <p:sp>
+        <p:nvSpPr>
+          <p:cNvPr id="4" name="Text 1"/>
           <p:cNvSpPr txBox="1"/>
           <p:nvPr/>
         </p:nvSpPr>
@@ -3614,7 +3861,7 @@
             <a:r>
               <a:rPr lang="en-US" sz="2500" b="1" dirty="0">
                 <a:solidFill>
-                  <a:srgbClr val="1E2761"/>
+                  <a:srgbClr val="1C2430"/>
                 </a:solidFill>
                 <a:latin typeface="Meiryo UI" pitchFamily="34" charset="0"/>
                 <a:ea typeface="Meiryo UI" pitchFamily="34" charset="-122"/>
@@ -3628,7 +3875,7 @@
       </p:sp>
       <p:sp>
         <p:nvSpPr>
-          <p:cNvPr id="3" name="Text 1"/>
+          <p:cNvPr id="5" name="Text 2"/>
           <p:cNvSpPr txBox="1"/>
           <p:nvPr/>
         </p:nvSpPr>
@@ -3667,14 +3914,14 @@
       </p:sp>
       <p:pic>
         <p:nvPicPr>
-          <p:cNvPr id="4" name="Image 0" descr="shots/02_result.png">    </p:cNvPr>
+          <p:cNvPr id="6" name="Image 1" descr="shots/02_result.png">    </p:cNvPr>
           <p:cNvPicPr>
             <a:picLocks noChangeAspect="1"/>
           </p:cNvPicPr>
           <p:nvPr/>
         </p:nvPicPr>
         <p:blipFill>
-          <a:blip r:embed="rId1"/>
+          <a:blip r:embed="rId2"/>
           <a:stretch>
             <a:fillRect/>
           </a:stretch>
@@ -3698,7 +3945,7 @@
       </p:pic>
       <p:sp>
         <p:nvSpPr>
-          <p:cNvPr id="5" name="Text 2"/>
+          <p:cNvPr id="7" name="Text 3"/>
           <p:cNvSpPr txBox="1"/>
           <p:nvPr/>
         </p:nvSpPr>
@@ -3723,7 +3970,7 @@
             <a:r>
               <a:rPr lang="en-US" sz="1600" b="1" dirty="0">
                 <a:solidFill>
-                  <a:srgbClr val="0F6AB4"/>
+                  <a:srgbClr val="045292"/>
                 </a:solidFill>
                 <a:latin typeface="Meiryo UI" pitchFamily="34" charset="0"/>
                 <a:ea typeface="Meiryo UI" pitchFamily="34" charset="-122"/>
@@ -3737,7 +3984,7 @@
       </p:sp>
       <p:sp>
         <p:nvSpPr>
-          <p:cNvPr id="6" name="Text 3"/>
+          <p:cNvPr id="8" name="Text 4"/>
           <p:cNvSpPr txBox="1"/>
           <p:nvPr/>
         </p:nvSpPr>
@@ -3822,7 +4069,7 @@
       </p:sp>
       <p:sp>
         <p:nvSpPr>
-          <p:cNvPr id="7" name="Shape 4"/>
+          <p:cNvPr id="9" name="Shape 5"/>
           <p:cNvSpPr/>
           <p:nvPr/>
         </p:nvSpPr>
@@ -3844,7 +4091,7 @@
       </p:sp>
       <p:sp>
         <p:nvSpPr>
-          <p:cNvPr id="8" name="Text 5"/>
+          <p:cNvPr id="10" name="Text 6"/>
           <p:cNvSpPr txBox="1"/>
           <p:nvPr/>
         </p:nvSpPr>
@@ -3872,7 +4119,7 @@
             <a:r>
               <a:rPr lang="en-US" sz="1150" b="1" dirty="0">
                 <a:solidFill>
-                  <a:srgbClr val="0F6AB4"/>
+                  <a:srgbClr val="045292"/>
                 </a:solidFill>
                 <a:latin typeface="Meiryo UI" pitchFamily="34" charset="0"/>
                 <a:ea typeface="Meiryo UI" pitchFamily="34" charset="-122"/>
@@ -3933,9 +4180,55 @@
           <a:chExt cx="0" cy="0"/>
         </a:xfrm>
       </p:grpSpPr>
-      <p:sp>
-        <p:nvSpPr>
-          <p:cNvPr id="2" name="Text 0"/>
+      <p:pic>
+        <p:nvPicPr>
+          <p:cNvPr id="2" name="Image 0" descr="/tmp/claude-0/-home-user-takashima-yuto-site/d68be841-4a50-5410-afb9-fdf52bb655ee/scratchpad/sekisan/kcm_stripe.png">    </p:cNvPr>
+          <p:cNvPicPr>
+            <a:picLocks noChangeAspect="1"/>
+          </p:cNvPicPr>
+          <p:nvPr/>
+        </p:nvPicPr>
+        <p:blipFill>
+          <a:blip r:embed="rId1"/>
+          <a:stretch>
+            <a:fillRect/>
+          </a:stretch>
+        </p:blipFill>
+        <p:spPr>
+          <a:xfrm>
+            <a:off x="0" y="6656832"/>
+            <a:ext cx="12188952" cy="201168"/>
+          </a:xfrm>
+          <a:prstGeom prst="rect">
+            <a:avLst/>
+          </a:prstGeom>
+        </p:spPr>
+      </p:pic>
+      <p:sp>
+        <p:nvSpPr>
+          <p:cNvPr id="3" name="Shape 0"/>
+          <p:cNvSpPr/>
+          <p:nvPr/>
+        </p:nvSpPr>
+        <p:spPr>
+          <a:xfrm>
+            <a:off x="457200" y="658368"/>
+            <a:ext cx="6199632" cy="292608"/>
+          </a:xfrm>
+          <a:prstGeom prst="rect">
+            <a:avLst/>
+          </a:prstGeom>
+          <a:solidFill>
+            <a:srgbClr val="E3EA61">
+              <a:alpha val="75000"/>
+            </a:srgbClr>
+          </a:solidFill>
+          <a:ln/>
+        </p:spPr>
+      </p:sp>
+      <p:sp>
+        <p:nvSpPr>
+          <p:cNvPr id="4" name="Text 1"/>
           <p:cNvSpPr txBox="1"/>
           <p:nvPr/>
         </p:nvSpPr>
@@ -3960,7 +4253,7 @@
             <a:r>
               <a:rPr lang="en-US" sz="2500" b="1" dirty="0">
                 <a:solidFill>
-                  <a:srgbClr val="1E2761"/>
+                  <a:srgbClr val="1C2430"/>
                 </a:solidFill>
                 <a:latin typeface="Meiryo UI" pitchFamily="34" charset="0"/>
                 <a:ea typeface="Meiryo UI" pitchFamily="34" charset="-122"/>
@@ -3974,7 +4267,7 @@
       </p:sp>
       <p:sp>
         <p:nvSpPr>
-          <p:cNvPr id="3" name="Text 1"/>
+          <p:cNvPr id="5" name="Text 2"/>
           <p:cNvSpPr txBox="1"/>
           <p:nvPr/>
         </p:nvSpPr>
@@ -4013,14 +4306,14 @@
       </p:sp>
       <p:pic>
         <p:nvPicPr>
-          <p:cNvPr id="4" name="Image 0" descr="shots/03_editor.png">    </p:cNvPr>
+          <p:cNvPr id="6" name="Image 1" descr="shots/03_editor.png">    </p:cNvPr>
           <p:cNvPicPr>
             <a:picLocks noChangeAspect="1"/>
           </p:cNvPicPr>
           <p:nvPr/>
         </p:nvPicPr>
         <p:blipFill>
-          <a:blip r:embed="rId1"/>
+          <a:blip r:embed="rId2"/>
           <a:stretch>
             <a:fillRect/>
           </a:stretch>
@@ -4044,7 +4337,7 @@
       </p:pic>
       <p:sp>
         <p:nvSpPr>
-          <p:cNvPr id="5" name="Text 2"/>
+          <p:cNvPr id="7" name="Text 3"/>
           <p:cNvSpPr txBox="1"/>
           <p:nvPr/>
         </p:nvSpPr>
@@ -4069,7 +4362,7 @@
             <a:r>
               <a:rPr lang="en-US" sz="1600" b="1" dirty="0">
                 <a:solidFill>
-                  <a:srgbClr val="0F6AB4"/>
+                  <a:srgbClr val="045292"/>
                 </a:solidFill>
                 <a:latin typeface="Meiryo UI" pitchFamily="34" charset="0"/>
                 <a:ea typeface="Meiryo UI" pitchFamily="34" charset="-122"/>
@@ -4083,7 +4376,7 @@
       </p:sp>
       <p:sp>
         <p:nvSpPr>
-          <p:cNvPr id="6" name="Shape 3"/>
+          <p:cNvPr id="8" name="Shape 4"/>
           <p:cNvSpPr/>
           <p:nvPr/>
         </p:nvSpPr>
@@ -4098,14 +4391,14 @@
             </a:avLst>
           </a:prstGeom>
           <a:solidFill>
-            <a:srgbClr val="F4F6F8"/>
+            <a:srgbClr val="F5F8FA"/>
           </a:solidFill>
           <a:ln/>
         </p:spPr>
       </p:sp>
       <p:sp>
         <p:nvSpPr>
-          <p:cNvPr id="7" name="Text 4"/>
+          <p:cNvPr id="9" name="Text 5"/>
           <p:cNvSpPr txBox="1"/>
           <p:nvPr/>
         </p:nvSpPr>
@@ -4130,7 +4423,7 @@
             <a:r>
               <a:rPr lang="en-US" sz="1250" b="1" dirty="0">
                 <a:solidFill>
-                  <a:srgbClr val="1E2761"/>
+                  <a:srgbClr val="045292"/>
                 </a:solidFill>
                 <a:latin typeface="Meiryo UI" pitchFamily="34" charset="0"/>
                 <a:ea typeface="Meiryo UI" pitchFamily="34" charset="-122"/>
@@ -4144,7 +4437,7 @@
       </p:sp>
       <p:sp>
         <p:nvSpPr>
-          <p:cNvPr id="8" name="Text 5"/>
+          <p:cNvPr id="10" name="Text 6"/>
           <p:cNvSpPr txBox="1"/>
           <p:nvPr/>
         </p:nvSpPr>
@@ -4186,7 +4479,7 @@
       </p:sp>
       <p:sp>
         <p:nvSpPr>
-          <p:cNvPr id="9" name="Shape 6"/>
+          <p:cNvPr id="11" name="Shape 7"/>
           <p:cNvSpPr/>
           <p:nvPr/>
         </p:nvSpPr>
@@ -4201,14 +4494,14 @@
             </a:avLst>
           </a:prstGeom>
           <a:solidFill>
-            <a:srgbClr val="F4F6F8"/>
+            <a:srgbClr val="F5F8FA"/>
           </a:solidFill>
           <a:ln/>
         </p:spPr>
       </p:sp>
       <p:sp>
         <p:nvSpPr>
-          <p:cNvPr id="10" name="Text 7"/>
+          <p:cNvPr id="12" name="Text 8"/>
           <p:cNvSpPr txBox="1"/>
           <p:nvPr/>
         </p:nvSpPr>
@@ -4233,7 +4526,7 @@
             <a:r>
               <a:rPr lang="en-US" sz="1250" b="1" dirty="0">
                 <a:solidFill>
-                  <a:srgbClr val="1E2761"/>
+                  <a:srgbClr val="045292"/>
                 </a:solidFill>
                 <a:latin typeface="Meiryo UI" pitchFamily="34" charset="0"/>
                 <a:ea typeface="Meiryo UI" pitchFamily="34" charset="-122"/>
@@ -4247,7 +4540,7 @@
       </p:sp>
       <p:sp>
         <p:nvSpPr>
-          <p:cNvPr id="11" name="Text 8"/>
+          <p:cNvPr id="13" name="Text 9"/>
           <p:cNvSpPr txBox="1"/>
           <p:nvPr/>
         </p:nvSpPr>
@@ -4289,7 +4582,7 @@
       </p:sp>
       <p:sp>
         <p:nvSpPr>
-          <p:cNvPr id="12" name="Shape 9"/>
+          <p:cNvPr id="14" name="Shape 10"/>
           <p:cNvSpPr/>
           <p:nvPr/>
         </p:nvSpPr>
@@ -4304,14 +4597,14 @@
             </a:avLst>
           </a:prstGeom>
           <a:solidFill>
-            <a:srgbClr val="F4F6F8"/>
+            <a:srgbClr val="F5F8FA"/>
           </a:solidFill>
           <a:ln/>
         </p:spPr>
       </p:sp>
       <p:sp>
         <p:nvSpPr>
-          <p:cNvPr id="13" name="Text 10"/>
+          <p:cNvPr id="15" name="Text 11"/>
           <p:cNvSpPr txBox="1"/>
           <p:nvPr/>
         </p:nvSpPr>
@@ -4336,7 +4629,7 @@
             <a:r>
               <a:rPr lang="en-US" sz="1250" b="1" dirty="0">
                 <a:solidFill>
-                  <a:srgbClr val="1E2761"/>
+                  <a:srgbClr val="045292"/>
                 </a:solidFill>
                 <a:latin typeface="Meiryo UI" pitchFamily="34" charset="0"/>
                 <a:ea typeface="Meiryo UI" pitchFamily="34" charset="-122"/>
@@ -4350,7 +4643,7 @@
       </p:sp>
       <p:sp>
         <p:nvSpPr>
-          <p:cNvPr id="14" name="Text 11"/>
+          <p:cNvPr id="16" name="Text 12"/>
           <p:cNvSpPr txBox="1"/>
           <p:nvPr/>
         </p:nvSpPr>
@@ -4392,7 +4685,7 @@
       </p:sp>
       <p:sp>
         <p:nvSpPr>
-          <p:cNvPr id="15" name="Shape 12"/>
+          <p:cNvPr id="17" name="Shape 13"/>
           <p:cNvSpPr/>
           <p:nvPr/>
         </p:nvSpPr>
@@ -4407,14 +4700,14 @@
             </a:avLst>
           </a:prstGeom>
           <a:solidFill>
-            <a:srgbClr val="F4F6F8"/>
+            <a:srgbClr val="F5F8FA"/>
           </a:solidFill>
           <a:ln/>
         </p:spPr>
       </p:sp>
       <p:sp>
         <p:nvSpPr>
-          <p:cNvPr id="16" name="Text 13"/>
+          <p:cNvPr id="18" name="Text 14"/>
           <p:cNvSpPr txBox="1"/>
           <p:nvPr/>
         </p:nvSpPr>
@@ -4439,7 +4732,7 @@
             <a:r>
               <a:rPr lang="en-US" sz="1250" b="1" dirty="0">
                 <a:solidFill>
-                  <a:srgbClr val="1E2761"/>
+                  <a:srgbClr val="045292"/>
                 </a:solidFill>
                 <a:latin typeface="Meiryo UI" pitchFamily="34" charset="0"/>
                 <a:ea typeface="Meiryo UI" pitchFamily="34" charset="-122"/>
@@ -4453,7 +4746,7 @@
       </p:sp>
       <p:sp>
         <p:nvSpPr>
-          <p:cNvPr id="17" name="Text 14"/>
+          <p:cNvPr id="19" name="Text 15"/>
           <p:cNvSpPr txBox="1"/>
           <p:nvPr/>
         </p:nvSpPr>
@@ -4525,9 +4818,55 @@
           <a:chExt cx="0" cy="0"/>
         </a:xfrm>
       </p:grpSpPr>
-      <p:sp>
-        <p:nvSpPr>
-          <p:cNvPr id="2" name="Text 0"/>
+      <p:pic>
+        <p:nvPicPr>
+          <p:cNvPr id="2" name="Image 0" descr="/tmp/claude-0/-home-user-takashima-yuto-site/d68be841-4a50-5410-afb9-fdf52bb655ee/scratchpad/sekisan/kcm_stripe.png">    </p:cNvPr>
+          <p:cNvPicPr>
+            <a:picLocks noChangeAspect="1"/>
+          </p:cNvPicPr>
+          <p:nvPr/>
+        </p:nvPicPr>
+        <p:blipFill>
+          <a:blip r:embed="rId1"/>
+          <a:stretch>
+            <a:fillRect/>
+          </a:stretch>
+        </p:blipFill>
+        <p:spPr>
+          <a:xfrm>
+            <a:off x="0" y="6656832"/>
+            <a:ext cx="12188952" cy="201168"/>
+          </a:xfrm>
+          <a:prstGeom prst="rect">
+            <a:avLst/>
+          </a:prstGeom>
+        </p:spPr>
+      </p:pic>
+      <p:sp>
+        <p:nvSpPr>
+          <p:cNvPr id="3" name="Shape 0"/>
+          <p:cNvSpPr/>
+          <p:nvPr/>
+        </p:nvSpPr>
+        <p:spPr>
+          <a:xfrm>
+            <a:off x="457200" y="658368"/>
+            <a:ext cx="4224528" cy="292608"/>
+          </a:xfrm>
+          <a:prstGeom prst="rect">
+            <a:avLst/>
+          </a:prstGeom>
+          <a:solidFill>
+            <a:srgbClr val="E3EA61">
+              <a:alpha val="75000"/>
+            </a:srgbClr>
+          </a:solidFill>
+          <a:ln/>
+        </p:spPr>
+      </p:sp>
+      <p:sp>
+        <p:nvSpPr>
+          <p:cNvPr id="4" name="Text 1"/>
           <p:cNvSpPr txBox="1"/>
           <p:nvPr/>
         </p:nvSpPr>
@@ -4552,7 +4891,7 @@
             <a:r>
               <a:rPr lang="en-US" sz="2500" b="1" dirty="0">
                 <a:solidFill>
-                  <a:srgbClr val="1E2761"/>
+                  <a:srgbClr val="1C2430"/>
                 </a:solidFill>
                 <a:latin typeface="Meiryo UI" pitchFamily="34" charset="0"/>
                 <a:ea typeface="Meiryo UI" pitchFamily="34" charset="-122"/>
@@ -4566,7 +4905,7 @@
       </p:sp>
       <p:sp>
         <p:nvSpPr>
-          <p:cNvPr id="3" name="Text 1"/>
+          <p:cNvPr id="5" name="Text 2"/>
           <p:cNvSpPr txBox="1"/>
           <p:nvPr/>
         </p:nvSpPr>
@@ -4642,7 +4981,7 @@
                       <a:r>
                         <a:rPr lang="en-US" sz="1300" b="1" dirty="0">
                           <a:solidFill>
-                            <a:srgbClr val="1E2761"/>
+                            <a:srgbClr val="045292"/>
                           </a:solidFill>
                           <a:latin typeface="Meiryo UI" pitchFamily="34" charset="0"/>
                           <a:ea typeface="Meiryo UI" pitchFamily="34" charset="-122"/>
@@ -4710,7 +5049,7 @@
                       <a:r>
                         <a:rPr lang="en-US" sz="1300" b="1" dirty="0">
                           <a:solidFill>
-                            <a:srgbClr val="1E2761"/>
+                            <a:srgbClr val="045292"/>
                           </a:solidFill>
                           <a:latin typeface="Meiryo UI" pitchFamily="34" charset="0"/>
                           <a:ea typeface="Meiryo UI" pitchFamily="34" charset="-122"/>
@@ -4778,7 +5117,7 @@
                       <a:r>
                         <a:rPr lang="en-US" sz="1300" b="1" dirty="0">
                           <a:solidFill>
-                            <a:srgbClr val="1E2761"/>
+                            <a:srgbClr val="045292"/>
                           </a:solidFill>
                           <a:latin typeface="Meiryo UI" pitchFamily="34" charset="0"/>
                           <a:ea typeface="Meiryo UI" pitchFamily="34" charset="-122"/>
@@ -5642,7 +5981,7 @@
       </p:graphicFrame>
       <p:sp>
         <p:nvSpPr>
-          <p:cNvPr id="5" name="Text 2"/>
+          <p:cNvPr id="7" name="Text 3"/>
           <p:cNvSpPr txBox="1"/>
           <p:nvPr/>
         </p:nvSpPr>
@@ -5667,7 +6006,7 @@
             <a:r>
               <a:rPr lang="en-US" sz="1600" b="1" dirty="0">
                 <a:solidFill>
-                  <a:srgbClr val="0F6AB4"/>
+                  <a:srgbClr val="045292"/>
                 </a:solidFill>
                 <a:latin typeface="Meiryo UI" pitchFamily="34" charset="0"/>
                 <a:ea typeface="Meiryo UI" pitchFamily="34" charset="-122"/>
@@ -5681,7 +6020,7 @@
       </p:sp>
       <p:sp>
         <p:nvSpPr>
-          <p:cNvPr id="6" name="Text 3"/>
+          <p:cNvPr id="8" name="Text 4"/>
           <p:cNvSpPr txBox="1"/>
           <p:nvPr/>
         </p:nvSpPr>
@@ -5766,7 +6105,7 @@
       </p:sp>
       <p:sp>
         <p:nvSpPr>
-          <p:cNvPr id="7" name="Shape 4"/>
+          <p:cNvPr id="9" name="Shape 5"/>
           <p:cNvSpPr/>
           <p:nvPr/>
         </p:nvSpPr>
@@ -5788,7 +6127,7 @@
       </p:sp>
       <p:sp>
         <p:nvSpPr>
-          <p:cNvPr id="8" name="Text 5"/>
+          <p:cNvPr id="10" name="Text 6"/>
           <p:cNvSpPr txBox="1"/>
           <p:nvPr/>
         </p:nvSpPr>
@@ -5816,7 +6155,7 @@
             <a:r>
               <a:rPr lang="en-US" sz="1150" b="1" dirty="0">
                 <a:solidFill>
-                  <a:srgbClr val="0F6AB4"/>
+                  <a:srgbClr val="045292"/>
                 </a:solidFill>
                 <a:latin typeface="Meiryo UI" pitchFamily="34" charset="0"/>
                 <a:ea typeface="Meiryo UI" pitchFamily="34" charset="-122"/>
@@ -5877,9 +6216,55 @@
           <a:chExt cx="0" cy="0"/>
         </a:xfrm>
       </p:grpSpPr>
-      <p:sp>
-        <p:nvSpPr>
-          <p:cNvPr id="2" name="Text 0"/>
+      <p:pic>
+        <p:nvPicPr>
+          <p:cNvPr id="2" name="Image 0" descr="/tmp/claude-0/-home-user-takashima-yuto-site/d68be841-4a50-5410-afb9-fdf52bb655ee/scratchpad/sekisan/kcm_stripe.png">    </p:cNvPr>
+          <p:cNvPicPr>
+            <a:picLocks noChangeAspect="1"/>
+          </p:cNvPicPr>
+          <p:nvPr/>
+        </p:nvPicPr>
+        <p:blipFill>
+          <a:blip r:embed="rId1"/>
+          <a:stretch>
+            <a:fillRect/>
+          </a:stretch>
+        </p:blipFill>
+        <p:spPr>
+          <a:xfrm>
+            <a:off x="0" y="6656832"/>
+            <a:ext cx="12188952" cy="201168"/>
+          </a:xfrm>
+          <a:prstGeom prst="rect">
+            <a:avLst/>
+          </a:prstGeom>
+        </p:spPr>
+      </p:pic>
+      <p:sp>
+        <p:nvSpPr>
+          <p:cNvPr id="3" name="Shape 0"/>
+          <p:cNvSpPr/>
+          <p:nvPr/>
+        </p:nvSpPr>
+        <p:spPr>
+          <a:xfrm>
+            <a:off x="457200" y="658368"/>
+            <a:ext cx="3566160" cy="292608"/>
+          </a:xfrm>
+          <a:prstGeom prst="rect">
+            <a:avLst/>
+          </a:prstGeom>
+          <a:solidFill>
+            <a:srgbClr val="E3EA61">
+              <a:alpha val="75000"/>
+            </a:srgbClr>
+          </a:solidFill>
+          <a:ln/>
+        </p:spPr>
+      </p:sp>
+      <p:sp>
+        <p:nvSpPr>
+          <p:cNvPr id="4" name="Text 1"/>
           <p:cNvSpPr txBox="1"/>
           <p:nvPr/>
         </p:nvSpPr>
@@ -5904,7 +6289,7 @@
             <a:r>
               <a:rPr lang="en-US" sz="2500" b="1" dirty="0">
                 <a:solidFill>
-                  <a:srgbClr val="1E2761"/>
+                  <a:srgbClr val="1C2430"/>
                 </a:solidFill>
                 <a:latin typeface="Meiryo UI" pitchFamily="34" charset="0"/>
                 <a:ea typeface="Meiryo UI" pitchFamily="34" charset="-122"/>
@@ -5918,7 +6303,7 @@
       </p:sp>
       <p:sp>
         <p:nvSpPr>
-          <p:cNvPr id="3" name="Text 1"/>
+          <p:cNvPr id="5" name="Text 2"/>
           <p:cNvSpPr txBox="1"/>
           <p:nvPr/>
         </p:nvSpPr>
@@ -5957,7 +6342,7 @@
       </p:sp>
       <p:sp>
         <p:nvSpPr>
-          <p:cNvPr id="4" name="Text 2"/>
+          <p:cNvPr id="6" name="Text 3"/>
           <p:cNvSpPr txBox="1"/>
           <p:nvPr/>
         </p:nvSpPr>
@@ -5982,7 +6367,7 @@
             <a:r>
               <a:rPr lang="en-US" sz="1600" b="1" dirty="0">
                 <a:solidFill>
-                  <a:srgbClr val="0F6AB4"/>
+                  <a:srgbClr val="045292"/>
                 </a:solidFill>
                 <a:latin typeface="Meiryo UI" pitchFamily="34" charset="0"/>
                 <a:ea typeface="Meiryo UI" pitchFamily="34" charset="-122"/>
@@ -5996,7 +6381,7 @@
       </p:sp>
       <p:sp>
         <p:nvSpPr>
-          <p:cNvPr id="5" name="Text 3"/>
+          <p:cNvPr id="7" name="Text 4"/>
           <p:cNvSpPr txBox="1"/>
           <p:nvPr/>
         </p:nvSpPr>
@@ -6038,14 +6423,14 @@
       </p:sp>
       <p:pic>
         <p:nvPicPr>
-          <p:cNvPr id="6" name="Image 0" descr="shots/07_restore.png">    </p:cNvPr>
+          <p:cNvPr id="8" name="Image 1" descr="shots/07_restore.png">    </p:cNvPr>
           <p:cNvPicPr>
             <a:picLocks noChangeAspect="1"/>
           </p:cNvPicPr>
           <p:nvPr/>
         </p:nvPicPr>
         <p:blipFill>
-          <a:blip r:embed="rId1"/>
+          <a:blip r:embed="rId2"/>
           <a:stretch>
             <a:fillRect/>
           </a:stretch>
@@ -6069,7 +6454,7 @@
       </p:pic>
       <p:sp>
         <p:nvSpPr>
-          <p:cNvPr id="7" name="Text 4"/>
+          <p:cNvPr id="9" name="Text 5"/>
           <p:cNvSpPr txBox="1"/>
           <p:nvPr/>
         </p:nvSpPr>
@@ -6094,7 +6479,7 @@
             <a:r>
               <a:rPr lang="en-US" sz="1600" b="1" dirty="0">
                 <a:solidFill>
-                  <a:srgbClr val="0F6AB4"/>
+                  <a:srgbClr val="045292"/>
                 </a:solidFill>
                 <a:latin typeface="Meiryo UI" pitchFamily="34" charset="0"/>
                 <a:ea typeface="Meiryo UI" pitchFamily="34" charset="-122"/>
@@ -6108,7 +6493,7 @@
       </p:sp>
       <p:sp>
         <p:nvSpPr>
-          <p:cNvPr id="8" name="Shape 5"/>
+          <p:cNvPr id="10" name="Shape 6"/>
           <p:cNvSpPr/>
           <p:nvPr/>
         </p:nvSpPr>
@@ -6121,14 +6506,14 @@
             <a:avLst/>
           </a:prstGeom>
           <a:solidFill>
-            <a:srgbClr val="0F6AB4"/>
+            <a:srgbClr val="045292"/>
           </a:solidFill>
           <a:ln/>
         </p:spPr>
       </p:sp>
       <p:sp>
         <p:nvSpPr>
-          <p:cNvPr id="9" name="Text 6"/>
+          <p:cNvPr id="11" name="Text 7"/>
           <p:cNvSpPr txBox="1"/>
           <p:nvPr/>
         </p:nvSpPr>
@@ -6167,7 +6552,7 @@
       </p:sp>
       <p:sp>
         <p:nvSpPr>
-          <p:cNvPr id="10" name="Text 7"/>
+          <p:cNvPr id="12" name="Text 8"/>
           <p:cNvSpPr txBox="1"/>
           <p:nvPr/>
         </p:nvSpPr>
@@ -6209,7 +6594,7 @@
       </p:sp>
       <p:sp>
         <p:nvSpPr>
-          <p:cNvPr id="11" name="Shape 8"/>
+          <p:cNvPr id="13" name="Shape 9"/>
           <p:cNvSpPr/>
           <p:nvPr/>
         </p:nvSpPr>
@@ -6222,14 +6607,14 @@
             <a:avLst/>
           </a:prstGeom>
           <a:solidFill>
-            <a:srgbClr val="0F6AB4"/>
+            <a:srgbClr val="045292"/>
           </a:solidFill>
           <a:ln/>
         </p:spPr>
       </p:sp>
       <p:sp>
         <p:nvSpPr>
-          <p:cNvPr id="12" name="Text 9"/>
+          <p:cNvPr id="14" name="Text 10"/>
           <p:cNvSpPr txBox="1"/>
           <p:nvPr/>
         </p:nvSpPr>
@@ -6268,7 +6653,7 @@
       </p:sp>
       <p:sp>
         <p:nvSpPr>
-          <p:cNvPr id="13" name="Text 10"/>
+          <p:cNvPr id="15" name="Text 11"/>
           <p:cNvSpPr txBox="1"/>
           <p:nvPr/>
         </p:nvSpPr>
@@ -6310,7 +6695,7 @@
       </p:sp>
       <p:sp>
         <p:nvSpPr>
-          <p:cNvPr id="14" name="Shape 11"/>
+          <p:cNvPr id="16" name="Shape 12"/>
           <p:cNvSpPr/>
           <p:nvPr/>
         </p:nvSpPr>
@@ -6332,7 +6717,7 @@
       </p:sp>
       <p:sp>
         <p:nvSpPr>
-          <p:cNvPr id="15" name="Text 12"/>
+          <p:cNvPr id="17" name="Text 13"/>
           <p:cNvSpPr txBox="1"/>
           <p:nvPr/>
         </p:nvSpPr>
@@ -6360,7 +6745,7 @@
             <a:r>
               <a:rPr lang="en-US" sz="1150" b="1" dirty="0">
                 <a:solidFill>
-                  <a:srgbClr val="0F6AB4"/>
+                  <a:srgbClr val="045292"/>
                 </a:solidFill>
                 <a:latin typeface="Meiryo UI" pitchFamily="34" charset="0"/>
                 <a:ea typeface="Meiryo UI" pitchFamily="34" charset="-122"/>
@@ -6421,9 +6806,55 @@
           <a:chExt cx="0" cy="0"/>
         </a:xfrm>
       </p:grpSpPr>
-      <p:sp>
-        <p:nvSpPr>
-          <p:cNvPr id="2" name="Text 0"/>
+      <p:pic>
+        <p:nvPicPr>
+          <p:cNvPr id="2" name="Image 0" descr="/tmp/claude-0/-home-user-takashima-yuto-site/d68be841-4a50-5410-afb9-fdf52bb655ee/scratchpad/sekisan/kcm_stripe.png">    </p:cNvPr>
+          <p:cNvPicPr>
+            <a:picLocks noChangeAspect="1"/>
+          </p:cNvPicPr>
+          <p:nvPr/>
+        </p:nvPicPr>
+        <p:blipFill>
+          <a:blip r:embed="rId1"/>
+          <a:stretch>
+            <a:fillRect/>
+          </a:stretch>
+        </p:blipFill>
+        <p:spPr>
+          <a:xfrm>
+            <a:off x="0" y="6656832"/>
+            <a:ext cx="12188952" cy="201168"/>
+          </a:xfrm>
+          <a:prstGeom prst="rect">
+            <a:avLst/>
+          </a:prstGeom>
+        </p:spPr>
+      </p:pic>
+      <p:sp>
+        <p:nvSpPr>
+          <p:cNvPr id="3" name="Shape 0"/>
+          <p:cNvSpPr/>
+          <p:nvPr/>
+        </p:nvSpPr>
+        <p:spPr>
+          <a:xfrm>
+            <a:off x="457200" y="658368"/>
+            <a:ext cx="5212080" cy="292608"/>
+          </a:xfrm>
+          <a:prstGeom prst="rect">
+            <a:avLst/>
+          </a:prstGeom>
+          <a:solidFill>
+            <a:srgbClr val="E3EA61">
+              <a:alpha val="75000"/>
+            </a:srgbClr>
+          </a:solidFill>
+          <a:ln/>
+        </p:spPr>
+      </p:sp>
+      <p:sp>
+        <p:nvSpPr>
+          <p:cNvPr id="4" name="Text 1"/>
           <p:cNvSpPr txBox="1"/>
           <p:nvPr/>
         </p:nvSpPr>
@@ -6448,7 +6879,7 @@
             <a:r>
               <a:rPr lang="en-US" sz="2500" b="1" dirty="0">
                 <a:solidFill>
-                  <a:srgbClr val="1E2761"/>
+                  <a:srgbClr val="1C2430"/>
                 </a:solidFill>
                 <a:latin typeface="Meiryo UI" pitchFamily="34" charset="0"/>
                 <a:ea typeface="Meiryo UI" pitchFamily="34" charset="-122"/>
@@ -6462,7 +6893,7 @@
       </p:sp>
       <p:sp>
         <p:nvSpPr>
-          <p:cNvPr id="3" name="Text 1"/>
+          <p:cNvPr id="5" name="Text 2"/>
           <p:cNvSpPr txBox="1"/>
           <p:nvPr/>
         </p:nvSpPr>
@@ -6501,7 +6932,7 @@
       </p:sp>
       <p:sp>
         <p:nvSpPr>
-          <p:cNvPr id="4" name="Text 2"/>
+          <p:cNvPr id="6" name="Text 3"/>
           <p:cNvSpPr txBox="1"/>
           <p:nvPr/>
         </p:nvSpPr>
@@ -6543,14 +6974,14 @@
       </p:sp>
       <p:pic>
         <p:nvPicPr>
-          <p:cNvPr id="5" name="Image 0" descr="shots/06_buttons.png">    </p:cNvPr>
+          <p:cNvPr id="7" name="Image 1" descr="shots/06_buttons.png">    </p:cNvPr>
           <p:cNvPicPr>
             <a:picLocks noChangeAspect="1"/>
           </p:cNvPicPr>
           <p:nvPr/>
         </p:nvPicPr>
         <p:blipFill>
-          <a:blip r:embed="rId1"/>
+          <a:blip r:embed="rId2"/>
           <a:stretch>
             <a:fillRect/>
           </a:stretch>
@@ -6610,7 +7041,7 @@
                       <a:r>
                         <a:rPr lang="en-US" sz="1250" b="1" dirty="0">
                           <a:solidFill>
-                            <a:srgbClr val="1E2761"/>
+                            <a:srgbClr val="045292"/>
                           </a:solidFill>
                           <a:latin typeface="Meiryo UI" pitchFamily="34" charset="0"/>
                           <a:ea typeface="Meiryo UI" pitchFamily="34" charset="-122"/>
@@ -6678,7 +7109,7 @@
                       <a:r>
                         <a:rPr lang="en-US" sz="1250" b="1" dirty="0">
                           <a:solidFill>
-                            <a:srgbClr val="1E2761"/>
+                            <a:srgbClr val="045292"/>
                           </a:solidFill>
                           <a:latin typeface="Meiryo UI" pitchFamily="34" charset="0"/>
                           <a:ea typeface="Meiryo UI" pitchFamily="34" charset="-122"/>
@@ -7270,7 +7701,7 @@
       </p:graphicFrame>
       <p:sp>
         <p:nvSpPr>
-          <p:cNvPr id="7" name="Text 3"/>
+          <p:cNvPr id="9" name="Text 4"/>
           <p:cNvSpPr txBox="1"/>
           <p:nvPr/>
         </p:nvSpPr>
@@ -7339,9 +7770,55 @@
           <a:chExt cx="0" cy="0"/>
         </a:xfrm>
       </p:grpSpPr>
-      <p:sp>
-        <p:nvSpPr>
-          <p:cNvPr id="2" name="Text 0"/>
+      <p:pic>
+        <p:nvPicPr>
+          <p:cNvPr id="2" name="Image 0" descr="/tmp/claude-0/-home-user-takashima-yuto-site/d68be841-4a50-5410-afb9-fdf52bb655ee/scratchpad/sekisan/kcm_stripe.png">    </p:cNvPr>
+          <p:cNvPicPr>
+            <a:picLocks noChangeAspect="1"/>
+          </p:cNvPicPr>
+          <p:nvPr/>
+        </p:nvPicPr>
+        <p:blipFill>
+          <a:blip r:embed="rId1"/>
+          <a:stretch>
+            <a:fillRect/>
+          </a:stretch>
+        </p:blipFill>
+        <p:spPr>
+          <a:xfrm>
+            <a:off x="0" y="6656832"/>
+            <a:ext cx="12188952" cy="201168"/>
+          </a:xfrm>
+          <a:prstGeom prst="rect">
+            <a:avLst/>
+          </a:prstGeom>
+        </p:spPr>
+      </p:pic>
+      <p:sp>
+        <p:nvSpPr>
+          <p:cNvPr id="3" name="Shape 0"/>
+          <p:cNvSpPr/>
+          <p:nvPr/>
+        </p:nvSpPr>
+        <p:spPr>
+          <a:xfrm>
+            <a:off x="457200" y="658368"/>
+            <a:ext cx="6528816" cy="292608"/>
+          </a:xfrm>
+          <a:prstGeom prst="rect">
+            <a:avLst/>
+          </a:prstGeom>
+          <a:solidFill>
+            <a:srgbClr val="E3EA61">
+              <a:alpha val="75000"/>
+            </a:srgbClr>
+          </a:solidFill>
+          <a:ln/>
+        </p:spPr>
+      </p:sp>
+      <p:sp>
+        <p:nvSpPr>
+          <p:cNvPr id="4" name="Text 1"/>
           <p:cNvSpPr txBox="1"/>
           <p:nvPr/>
         </p:nvSpPr>
@@ -7366,7 +7843,7 @@
             <a:r>
               <a:rPr lang="en-US" sz="2500" b="1" dirty="0">
                 <a:solidFill>
-                  <a:srgbClr val="1E2761"/>
+                  <a:srgbClr val="1C2430"/>
                 </a:solidFill>
                 <a:latin typeface="Meiryo UI" pitchFamily="34" charset="0"/>
                 <a:ea typeface="Meiryo UI" pitchFamily="34" charset="-122"/>
@@ -7380,7 +7857,7 @@
       </p:sp>
       <p:sp>
         <p:nvSpPr>
-          <p:cNvPr id="3" name="Text 1"/>
+          <p:cNvPr id="5" name="Text 2"/>
           <p:cNvSpPr txBox="1"/>
           <p:nvPr/>
         </p:nvSpPr>
@@ -7455,7 +7932,7 @@
                       <a:r>
                         <a:rPr lang="en-US" sz="1250" b="1" dirty="0">
                           <a:solidFill>
-                            <a:srgbClr val="1E2761"/>
+                            <a:srgbClr val="045292"/>
                           </a:solidFill>
                           <a:latin typeface="Meiryo UI" pitchFamily="34" charset="0"/>
                           <a:ea typeface="Meiryo UI" pitchFamily="34" charset="-122"/>
@@ -7523,7 +8000,7 @@
                       <a:r>
                         <a:rPr lang="en-US" sz="1250" b="1" dirty="0">
                           <a:solidFill>
-                            <a:srgbClr val="1E2761"/>
+                            <a:srgbClr val="045292"/>
                           </a:solidFill>
                           <a:latin typeface="Meiryo UI" pitchFamily="34" charset="0"/>
                           <a:ea typeface="Meiryo UI" pitchFamily="34" charset="-122"/>
@@ -8247,7 +8724,7 @@
       </p:graphicFrame>
       <p:sp>
         <p:nvSpPr>
-          <p:cNvPr id="5" name="Text 2"/>
+          <p:cNvPr id="7" name="Text 3"/>
           <p:cNvSpPr txBox="1"/>
           <p:nvPr/>
         </p:nvSpPr>
@@ -8272,7 +8749,7 @@
             <a:r>
               <a:rPr lang="en-US" sz="1400" b="1" dirty="0">
                 <a:solidFill>
-                  <a:srgbClr val="1E2761"/>
+                  <a:srgbClr val="045292"/>
                 </a:solidFill>
                 <a:latin typeface="Meiryo UI" pitchFamily="34" charset="0"/>
                 <a:ea typeface="Meiryo UI" pitchFamily="34" charset="-122"/>
